--- a/presentation/LedgerLens.pptx
+++ b/presentation/LedgerLens.pptx
@@ -2769,7 +2769,7 @@
                 <a:ea typeface="Calibri" pitchFamily="34" charset="-122"/>
                 <a:cs typeface="Calibri" pitchFamily="34" charset="-120"/>
               </a:rPr>
-              <a:t>30 to 60 minutes per break (practitioner estimate, not a benchmark)</a:t>
+              <a:t>30 to 60 minutes per break (my own estimate from production, not a benchmark)</a:t>
             </a:r>
             <a:endParaRPr lang="en-US" sz="1300" dirty="0"/>
           </a:p>
@@ -3982,7 +3982,7 @@
                 <a:ea typeface="Calibri" pitchFamily="34" charset="-122"/>
                 <a:cs typeface="Calibri" pitchFamily="34" charset="-120"/>
               </a:rPr>
-              <a:t>391 disbursals, ₹9.64 crore. One ES|QL STATS flags 10 breaks in ~40 ms. No join, no application code.</a:t>
+              <a:t>391 disbursals, ₹9.64 crore. One ES|QL STATS flags 10 breaks in 55 ms. No join, no application code.</a:t>
             </a:r>
             <a:endParaRPr lang="en-US" sz="1050" dirty="0"/>
           </a:p>
@@ -5212,7 +5212,7 @@
                 <a:ea typeface="Cambria" pitchFamily="34" charset="-122"/>
                 <a:cs typeface="Cambria" pitchFamily="34" charset="-120"/>
               </a:rPr>
-              <a:t>~40 ms</a:t>
+              <a:t>55 ms</a:t>
             </a:r>
             <a:endParaRPr lang="en-US" sz="3400" dirty="0"/>
           </a:p>
@@ -5251,7 +5251,7 @@
                 <a:ea typeface="Calibri" pitchFamily="34" charset="-122"/>
                 <a:cs typeface="Calibri" pitchFamily="34" charset="-120"/>
               </a:rPr>
-              <a:t>to match 391 disbursals against the settlement file</a:t>
+              <a:t>median ES|QL time to match 391 disbursals against the settlement file</a:t>
             </a:r>
             <a:endParaRPr lang="en-US" sz="1100" dirty="0"/>
           </a:p>
@@ -5290,7 +5290,7 @@
                 <a:ea typeface="Calibri" pitchFamily="34" charset="-122"/>
                 <a:cs typeface="Calibri" pitchFamily="34" charset="-120"/>
               </a:rPr>
-              <a:t>ES|QL took, ledgerlens.list_breaks</a:t>
+              <a:t>ES|QL took, BENCHMARKS.md, local ES 9.5.4</a:t>
             </a:r>
             <a:endParaRPr lang="en-US" sz="900" dirty="0"/>
           </a:p>
@@ -5617,7 +5617,7 @@
                 <a:ea typeface="Calibri" pitchFamily="34" charset="-122"/>
                 <a:cs typeface="Calibri" pitchFamily="34" charset="-120"/>
               </a:rPr>
-              <a:t>Investigation time: seconds, measured on screen during the demo. Manual baseline: 30 to 60 minutes per break, a practitioner estimate, not a benchmark.</a:t>
+              <a:t>Investigation time: seconds, measured on screen during the demo. Manual baseline: 30 to 60 minutes per break, my own estimate from operating this class of system in production, not a benchmark.</a:t>
             </a:r>
             <a:endParaRPr lang="en-US" sz="1100" dirty="0"/>
           </a:p>
